--- a/Java_ppt/5장. 상속과 다형성.pptx
+++ b/Java_ppt/5장. 상속과 다형성.pptx
@@ -13053,7 +13053,7 @@
         </p:nvGrpSpPr>
         <p:grpSpPr>
           <a:xfrm rot="16200000">
-            <a:off x="5113527" y="2633441"/>
+            <a:off x="5041519" y="2172959"/>
             <a:ext cx="183001" cy="771552"/>
             <a:chOff x="4022240" y="4146776"/>
             <a:chExt cx="164428" cy="628486"/>
@@ -13155,7 +13155,7 @@
         </p:nvSpPr>
         <p:spPr>
           <a:xfrm>
-            <a:off x="1712640" y="1880828"/>
+            <a:off x="1366502" y="1809032"/>
             <a:ext cx="2654030" cy="504056"/>
           </a:xfrm>
           <a:prstGeom prst="rect">
@@ -13198,7 +13198,7 @@
         </p:nvSpPr>
         <p:spPr>
           <a:xfrm>
-            <a:off x="1712640" y="2384884"/>
+            <a:off x="1366502" y="2313088"/>
             <a:ext cx="2654030" cy="1008112"/>
           </a:xfrm>
           <a:prstGeom prst="rect">
@@ -13251,7 +13251,7 @@
         </p:nvSpPr>
         <p:spPr>
           <a:xfrm>
-            <a:off x="1712640" y="3374443"/>
+            <a:off x="1366502" y="3302647"/>
             <a:ext cx="2654030" cy="986016"/>
           </a:xfrm>
           <a:prstGeom prst="rect">
@@ -13312,7 +13312,7 @@
         </p:nvSpPr>
         <p:spPr>
           <a:xfrm>
-            <a:off x="5673080" y="2132856"/>
+            <a:off x="5601072" y="1672374"/>
             <a:ext cx="2160240" cy="504056"/>
           </a:xfrm>
           <a:prstGeom prst="rect">
@@ -13363,7 +13363,7 @@
         </p:nvSpPr>
         <p:spPr>
           <a:xfrm>
-            <a:off x="5673080" y="2636912"/>
+            <a:off x="5601072" y="2176430"/>
             <a:ext cx="2160240" cy="504056"/>
           </a:xfrm>
           <a:prstGeom prst="rect">
@@ -13404,7 +13404,7 @@
         </p:nvSpPr>
         <p:spPr>
           <a:xfrm>
-            <a:off x="5673080" y="3142821"/>
+            <a:off x="5601072" y="2682339"/>
             <a:ext cx="2160240" cy="862243"/>
           </a:xfrm>
           <a:prstGeom prst="rect">
@@ -13443,6 +13443,185 @@
             <a:r>
               <a:rPr lang="en-US" altLang="ko-KR" sz="2000" dirty="0" err="1"/>
               <a:t>showInfo</a:t>
+            </a:r>
+            <a:r>
+              <a:rPr lang="en-US" altLang="ko-KR" sz="2000" dirty="0"/>
+              <a:t>()</a:t>
+            </a:r>
+          </a:p>
+        </p:txBody>
+      </p:sp>
+      <p:sp>
+        <p:nvSpPr>
+          <p:cNvPr id="2" name="직사각형 1">
+            <a:extLst>
+              <a:ext uri="{FF2B5EF4-FFF2-40B4-BE49-F238E27FC236}">
+                <a16:creationId xmlns:a16="http://schemas.microsoft.com/office/drawing/2014/main" id="{BD2DC1C1-1950-25A4-4DF2-75E1F83F6D00}"/>
+              </a:ext>
+            </a:extLst>
+          </p:cNvPr>
+          <p:cNvSpPr/>
+          <p:nvPr/>
+        </p:nvSpPr>
+        <p:spPr>
+          <a:xfrm>
+            <a:off x="4558455" y="3717610"/>
+            <a:ext cx="2654030" cy="504056"/>
+          </a:xfrm>
+          <a:prstGeom prst="rect">
+            <a:avLst/>
+          </a:prstGeom>
+          <a:ln/>
+        </p:spPr>
+        <p:style>
+          <a:lnRef idx="2">
+            <a:schemeClr val="accent1"/>
+          </a:lnRef>
+          <a:fillRef idx="1">
+            <a:schemeClr val="lt1"/>
+          </a:fillRef>
+          <a:effectRef idx="0">
+            <a:schemeClr val="accent1"/>
+          </a:effectRef>
+          <a:fontRef idx="minor">
+            <a:schemeClr val="dk1"/>
+          </a:fontRef>
+        </p:style>
+        <p:txBody>
+          <a:bodyPr rtlCol="0" anchor="ctr"/>
+          <a:lstStyle/>
+          <a:p>
+            <a:pPr algn="ctr"/>
+            <a:r>
+              <a:rPr lang="en-US" altLang="ko-KR" sz="2000" dirty="0"/>
+              <a:t>Cart</a:t>
+            </a:r>
+            <a:endParaRPr lang="ko-KR" altLang="en-US" sz="2000" dirty="0"/>
+          </a:p>
+        </p:txBody>
+      </p:sp>
+      <p:sp>
+        <p:nvSpPr>
+          <p:cNvPr id="3" name="직사각형 2">
+            <a:extLst>
+              <a:ext uri="{FF2B5EF4-FFF2-40B4-BE49-F238E27FC236}">
+                <a16:creationId xmlns:a16="http://schemas.microsoft.com/office/drawing/2014/main" id="{CB4028C3-822D-F7B1-49AE-7DBBDC85693B}"/>
+              </a:ext>
+            </a:extLst>
+          </p:cNvPr>
+          <p:cNvSpPr/>
+          <p:nvPr/>
+        </p:nvSpPr>
+        <p:spPr>
+          <a:xfrm>
+            <a:off x="4558455" y="4221666"/>
+            <a:ext cx="2654030" cy="532765"/>
+          </a:xfrm>
+          <a:prstGeom prst="rect">
+            <a:avLst/>
+          </a:prstGeom>
+          <a:ln/>
+        </p:spPr>
+        <p:style>
+          <a:lnRef idx="2">
+            <a:schemeClr val="accent1"/>
+          </a:lnRef>
+          <a:fillRef idx="1">
+            <a:schemeClr val="lt1"/>
+          </a:fillRef>
+          <a:effectRef idx="0">
+            <a:schemeClr val="accent1"/>
+          </a:effectRef>
+          <a:fontRef idx="minor">
+            <a:schemeClr val="dk1"/>
+          </a:fontRef>
+        </p:style>
+        <p:txBody>
+          <a:bodyPr rtlCol="0" anchor="ctr"/>
+          <a:lstStyle/>
+          <a:p>
+            <a:r>
+              <a:rPr lang="en-US" altLang="ko-KR" sz="2000" dirty="0"/>
+              <a:t> -items: list</a:t>
+            </a:r>
+          </a:p>
+        </p:txBody>
+      </p:sp>
+      <p:sp>
+        <p:nvSpPr>
+          <p:cNvPr id="4" name="직사각형 3">
+            <a:extLst>
+              <a:ext uri="{FF2B5EF4-FFF2-40B4-BE49-F238E27FC236}">
+                <a16:creationId xmlns:a16="http://schemas.microsoft.com/office/drawing/2014/main" id="{8A53D1B1-7B67-CA5E-705F-46F593BE12A7}"/>
+              </a:ext>
+            </a:extLst>
+          </p:cNvPr>
+          <p:cNvSpPr/>
+          <p:nvPr/>
+        </p:nvSpPr>
+        <p:spPr>
+          <a:xfrm>
+            <a:off x="4558455" y="4754431"/>
+            <a:ext cx="2654030" cy="1442810"/>
+          </a:xfrm>
+          <a:prstGeom prst="rect">
+            <a:avLst/>
+          </a:prstGeom>
+          <a:ln/>
+        </p:spPr>
+        <p:style>
+          <a:lnRef idx="2">
+            <a:schemeClr val="accent1"/>
+          </a:lnRef>
+          <a:fillRef idx="1">
+            <a:schemeClr val="lt1"/>
+          </a:fillRef>
+          <a:effectRef idx="0">
+            <a:schemeClr val="accent1"/>
+          </a:effectRef>
+          <a:fontRef idx="minor">
+            <a:schemeClr val="dk1"/>
+          </a:fontRef>
+        </p:style>
+        <p:txBody>
+          <a:bodyPr rtlCol="0" anchor="ctr"/>
+          <a:lstStyle/>
+          <a:p>
+            <a:r>
+              <a:rPr lang="en-US" altLang="ko-KR" sz="2000" dirty="0"/>
+              <a:t> +</a:t>
+            </a:r>
+            <a:r>
+              <a:rPr lang="en-US" altLang="ko-KR" sz="2000" dirty="0" err="1"/>
+              <a:t>add_item</a:t>
+            </a:r>
+            <a:r>
+              <a:rPr lang="en-US" altLang="ko-KR" sz="2000" dirty="0"/>
+              <a:t>()</a:t>
+            </a:r>
+          </a:p>
+          <a:p>
+            <a:r>
+              <a:rPr lang="en-US" altLang="ko-KR" sz="2000" dirty="0"/>
+              <a:t> +</a:t>
+            </a:r>
+            <a:r>
+              <a:rPr lang="en-US" altLang="ko-KR" sz="2000" dirty="0" err="1"/>
+              <a:t>remove_item</a:t>
+            </a:r>
+            <a:r>
+              <a:rPr lang="en-US" altLang="ko-KR" sz="2000" dirty="0"/>
+              <a:t>()</a:t>
+            </a:r>
+          </a:p>
+          <a:p>
+            <a:r>
+              <a:rPr lang="en-US" altLang="ko-KR" sz="2000" dirty="0"/>
+              <a:t> +</a:t>
+            </a:r>
+            <a:r>
+              <a:rPr lang="en-US" altLang="ko-KR" sz="2000" dirty="0" err="1"/>
+              <a:t>get_items</a:t>
             </a:r>
             <a:r>
               <a:rPr lang="en-US" altLang="ko-KR" sz="2000" dirty="0"/>
